--- a/Day_2_Slides.pptx
+++ b/Day_2_Slides.pptx
@@ -14,7 +14,6 @@
     <p:sldId id="262" r:id="rId13"/>
     <p:sldId id="263" r:id="rId14"/>
     <p:sldId id="264" r:id="rId15"/>
-    <p:sldId id="265" r:id="rId16"/>
   </p:sldIdLst>
   <p:sldSz cx="12191695" cy="6858000" type="screen4x3"/>
   <p:notesSz cx="6858000" cy="9144000"/>
@@ -3219,8 +3218,8 @@
         </p:nvSpPr>
         <p:spPr>
           <a:xfrm>
-            <a:off x="548640" y="3474720"/>
-            <a:ext cx="10972800" cy="2743200"/>
+            <a:off x="548640" y="3291840"/>
+            <a:ext cx="10972800" cy="2926080"/>
           </a:xfrm>
           <a:prstGeom prst="rect">
             <a:avLst/>
@@ -3235,49 +3234,61 @@
           <a:p>
             <a:pPr algn="l"/>
             <a:r>
-              <a:rPr sz="2000" b="0">
+              <a:rPr sz="2200" b="0">
                 <a:solidFill>
                   <a:srgbClr val="DDEEFF"/>
                 </a:solidFill>
                 <a:latin typeface="Calibri"/>
               </a:rPr>
-              <a:t>Math Objective: Identify zeros by factoring or synthetic division; use zeros to graph.</a:t>
-            </a:r>
-          </a:p>
-          <a:p>
-            <a:pPr algn="l"/>
-            <a:r>
-              <a:rPr sz="2000" b="0">
+              <a:t>Essential Question:</a:t>
+            </a:r>
+          </a:p>
+          <a:p>
+            <a:pPr algn="l"/>
+            <a:r>
+              <a:rPr sz="2200" b="0">
                 <a:solidFill>
                   <a:srgbClr val="DDEEFF"/>
                 </a:solidFill>
                 <a:latin typeface="Calibri"/>
               </a:rPr>
-              <a:t>Essential Question: How do the zeros and a point on the graph determine the equation?</a:t>
-            </a:r>
-          </a:p>
-          <a:p>
-            <a:pPr algn="l"/>
-            <a:r>
-              <a:rPr sz="2000" b="0">
+              <a:t>How do the zeros — and a single point on the graph —</a:t>
+            </a:r>
+          </a:p>
+          <a:p>
+            <a:pPr algn="l"/>
+            <a:r>
+              <a:rPr sz="2200" b="0">
                 <a:solidFill>
                   <a:srgbClr val="DDEEFF"/>
                 </a:solidFill>
                 <a:latin typeface="Calibri"/>
               </a:rPr>
+              <a:t>determine the polynomial’s equation?</a:t>
+            </a:r>
+          </a:p>
+          <a:p>
+            <a:pPr algn="l"/>
+            <a:r>
+              <a:rPr sz="2200" b="0">
+                <a:solidFill>
+                  <a:srgbClr val="DDEEFF"/>
+                </a:solidFill>
+                <a:latin typeface="Calibri"/>
+              </a:rPr>
               <a:t/>
             </a:r>
           </a:p>
           <a:p>
             <a:pPr algn="l"/>
             <a:r>
-              <a:rPr sz="2000" b="0">
+              <a:rPr sz="2200" b="0">
                 <a:solidFill>
                   <a:srgbClr val="DDEEFF"/>
                 </a:solidFill>
                 <a:latin typeface="Calibri"/>
               </a:rPr>
-              <a:t>Materials: laptops (Desmos), blank paper, pencils, Blooket code.</a:t>
+              <a:t>Materials: laptop (Desmos), blank paper, pencil, Blooket code.</a:t>
             </a:r>
           </a:p>
         </p:txBody>
@@ -3312,163 +3323,7 @@
                 </a:solidFill>
                 <a:latin typeface="Calibri"/>
               </a:rPr>
-              <a:t>60-minute block  ·  post-spring-break Monday</a:t>
-            </a:r>
-          </a:p>
-        </p:txBody>
-      </p:sp>
-    </p:spTree>
-  </p:cSld>
-  <p:clrMapOvr>
-    <a:masterClrMapping/>
-  </p:clrMapOvr>
-</p:sld>
-</file>
-
-<file path=ppt/slides/slide10.xml><?xml version="1.0" encoding="utf-8"?>
-<p:sld xmlns:a="http://schemas.openxmlformats.org/drawingml/2006/main" xmlns:p="http://schemas.openxmlformats.org/presentationml/2006/main" xmlns:r="http://schemas.openxmlformats.org/officeDocument/2006/relationships">
-  <p:cSld>
-    <p:spTree>
-      <p:nvGrpSpPr>
-        <p:cNvPr id="1" name=""/>
-        <p:cNvGrpSpPr/>
-        <p:nvPr/>
-      </p:nvGrpSpPr>
-      <p:grpSpPr/>
-      <p:sp>
-        <p:nvSpPr>
-          <p:cNvPr id="2" name="Rectangle 1"/>
-          <p:cNvSpPr/>
-          <p:nvPr/>
-        </p:nvSpPr>
-        <p:spPr>
-          <a:xfrm>
-            <a:off x="0" y="0"/>
-            <a:ext cx="12191695" cy="6858000"/>
-          </a:xfrm>
-          <a:prstGeom prst="rect">
-            <a:avLst/>
-          </a:prstGeom>
-          <a:solidFill>
-            <a:srgbClr val="0B3C6C"/>
-          </a:solidFill>
-          <a:ln>
-            <a:noFill/>
-          </a:ln>
-          <a:effectLst/>
-        </p:spPr>
-        <p:style>
-          <a:lnRef idx="1">
-            <a:schemeClr val="accent1"/>
-          </a:lnRef>
-          <a:fillRef idx="3">
-            <a:schemeClr val="accent1"/>
-          </a:fillRef>
-          <a:effectRef idx="2">
-            <a:schemeClr val="accent1"/>
-          </a:effectRef>
-          <a:fontRef idx="minor">
-            <a:schemeClr val="lt1"/>
-          </a:fontRef>
-        </p:style>
-        <p:txBody>
-          <a:bodyPr rtlCol="0" anchor="ctr"/>
-          <a:lstStyle/>
-          <a:p>
-            <a:pPr algn="ctr"/>
-          </a:p>
-        </p:txBody>
-      </p:sp>
-      <p:sp>
-        <p:nvSpPr>
-          <p:cNvPr id="3" name="TextBox 2"/>
-          <p:cNvSpPr txBox="1"/>
-          <p:nvPr/>
-        </p:nvSpPr>
-        <p:spPr>
-          <a:xfrm>
-            <a:off x="548640" y="2103120"/>
-            <a:ext cx="10972800" cy="1097280"/>
-          </a:xfrm>
-          <a:prstGeom prst="rect">
-            <a:avLst/>
-          </a:prstGeom>
-          <a:noFill/>
-        </p:spPr>
-        <p:txBody>
-          <a:bodyPr wrap="square">
-            <a:spAutoFit/>
-          </a:bodyPr>
-          <a:lstStyle/>
-          <a:p>
-            <a:pPr algn="ctr"/>
-            <a:r>
-              <a:rPr sz="5200" b="1">
-                <a:solidFill>
-                  <a:srgbClr val="FFFFFF"/>
-                </a:solidFill>
-                <a:latin typeface="Calibri"/>
-              </a:rPr>
-              <a:t>Nice work today.</a:t>
-            </a:r>
-          </a:p>
-        </p:txBody>
-      </p:sp>
-      <p:sp>
-        <p:nvSpPr>
-          <p:cNvPr id="4" name="TextBox 3"/>
-          <p:cNvSpPr txBox="1"/>
-          <p:nvPr/>
-        </p:nvSpPr>
-        <p:spPr>
-          <a:xfrm>
-            <a:off x="548640" y="3749039"/>
-            <a:ext cx="10972800" cy="1828800"/>
-          </a:xfrm>
-          <a:prstGeom prst="rect">
-            <a:avLst/>
-          </a:prstGeom>
-          <a:noFill/>
-        </p:spPr>
-        <p:txBody>
-          <a:bodyPr wrap="square">
-            <a:spAutoFit/>
-          </a:bodyPr>
-          <a:lstStyle/>
-          <a:p>
-            <a:pPr algn="ctr"/>
-            <a:r>
-              <a:rPr sz="2200" b="0">
-                <a:solidFill>
-                  <a:srgbClr val="DDEEFF"/>
-                </a:solidFill>
-                <a:latin typeface="Calibri"/>
-              </a:rPr>
-              <a:t>Collect:  Exit Ticket  ·  Do Now sheet  ·  Reverse Engineering page</a:t>
-            </a:r>
-          </a:p>
-          <a:p>
-            <a:pPr algn="ctr"/>
-            <a:r>
-              <a:rPr sz="2200" b="0">
-                <a:solidFill>
-                  <a:srgbClr val="DDEEFF"/>
-                </a:solidFill>
-                <a:latin typeface="Calibri"/>
-              </a:rPr>
-              <a:t/>
-            </a:r>
-          </a:p>
-          <a:p>
-            <a:pPr algn="ctr"/>
-            <a:r>
-              <a:rPr sz="2200" b="0">
-                <a:solidFill>
-                  <a:srgbClr val="DDEEFF"/>
-                </a:solidFill>
-                <a:latin typeface="Calibri"/>
-              </a:rPr>
-              <a:t>Day 3 preview:  we name what happened at x = 4 in g(x).</a:t>
+              <a:t>57-minute lesson  ·  one DOK-3 driver</a:t>
             </a:r>
           </a:p>
         </p:txBody>
@@ -3608,7 +3463,7 @@
                 </a:solidFill>
                 <a:latin typeface="Calibri"/>
               </a:rPr>
-              <a:t>Do Now  —  Sign Flip Prediction (Solo Paper)</a:t>
+              <a:t>Do Now  —  Sign Flip Prediction</a:t>
             </a:r>
           </a:p>
         </p:txBody>
@@ -3643,7 +3498,7 @@
                 </a:solidFill>
                 <a:latin typeface="Calibri"/>
               </a:rPr>
-              <a:t>Phase 1/8  ·  Algebra 2  ·  Lesson 3-5  ·  Day 2</a:t>
+              <a:t>Phase 1/7  ·  Algebra 2  ·  Lesson 3-5  ·  Day 2</a:t>
             </a:r>
           </a:p>
         </p:txBody>
@@ -3881,7 +3736,7 @@
                 </a:solidFill>
                 <a:latin typeface="Calibri"/>
               </a:rPr>
-              <a:t>1.  What will stay the EXACT SAME?</a:t>
+              <a:t>1.  What STAYS THE SAME?  What CHANGES?  Be specific.</a:t>
             </a:r>
           </a:p>
           <a:p>
@@ -3893,7 +3748,7 @@
                 </a:solidFill>
                 <a:latin typeface="Calibri"/>
               </a:rPr>
-              <a:t>2.  What will CHANGE? How do you know BEFORE graphing?</a:t>
+              <a:t/>
             </a:r>
           </a:p>
           <a:p>
@@ -3905,7 +3760,7 @@
                 </a:solidFill>
                 <a:latin typeface="Calibri"/>
               </a:rPr>
-              <a:t>3.  Finish: “The zeros stay the same because ___, and the graph changes because ___.”</a:t>
+              <a:t>2.  Finish:  “The zeros stay the same because ___,</a:t>
             </a:r>
           </a:p>
           <a:p>
@@ -3917,6 +3772,18 @@
                 </a:solidFill>
                 <a:latin typeface="Calibri"/>
               </a:rPr>
+              <a:t>                  and the graph changes because ___.”</a:t>
+            </a:r>
+          </a:p>
+          <a:p>
+            <a:pPr algn="l"/>
+            <a:r>
+              <a:rPr sz="2400" b="0">
+                <a:solidFill>
+                  <a:srgbClr val="112233"/>
+                </a:solidFill>
+                <a:latin typeface="Calibri"/>
+              </a:rPr>
               <a:t/>
             </a:r>
           </a:p>
@@ -3929,7 +3796,7 @@
                 </a:solidFill>
                 <a:latin typeface="Calibri"/>
               </a:rPr>
-              <a:t>Silent · Pencil only · No Desmos · No packet yet</a:t>
+              <a:t>Silent  ·  Pencil only  ·  No Desmos  ·  No packet yet</a:t>
             </a:r>
           </a:p>
         </p:txBody>
@@ -4007,7 +3874,7 @@
                 </a:solidFill>
                 <a:latin typeface="Calibri"/>
               </a:rPr>
-              <a:t>When everyone's back:  Blooket code coming on the screen.</a:t>
+              <a:t>When everyone’s back:  Blooket code on the screen.</a:t>
             </a:r>
           </a:p>
         </p:txBody>
@@ -4182,7 +4049,7 @@
                 </a:solidFill>
                 <a:latin typeface="Calibri"/>
               </a:rPr>
-              <a:t>Phase 2/8  ·  Algebra 2  ·  Lesson 3-5  ·  Day 2</a:t>
+              <a:t>Phase 2/7  ·  Algebra 2  ·  Lesson 3-5  ·  Day 2</a:t>
             </a:r>
           </a:p>
         </p:txBody>
@@ -4423,7 +4290,7 @@
                 </a:solidFill>
                 <a:latin typeface="Calibri"/>
               </a:rPr>
-              <a:t>Chromebooks open · Type the code · Enter a nickname</a:t>
+              <a:t>Chromebooks open  ·  Type the code  ·  Enter a nickname</a:t>
             </a:r>
           </a:p>
         </p:txBody>
@@ -4501,7 +4368,7 @@
                 </a:solidFill>
                 <a:latin typeface="Calibri"/>
               </a:rPr>
-              <a:t>2 minutes to log in. Game waits for no one.</a:t>
+              <a:t>2 minutes to log in.  Game waits for no one.</a:t>
             </a:r>
           </a:p>
         </p:txBody>
@@ -4641,7 +4508,7 @@
                 </a:solidFill>
                 <a:latin typeface="Calibri"/>
               </a:rPr>
-              <a:t>Blooket  —  Warm-Up Game</a:t>
+              <a:t>Blooket  —  Rule Recall</a:t>
             </a:r>
           </a:p>
         </p:txBody>
@@ -4676,7 +4543,7 @@
                 </a:solidFill>
                 <a:latin typeface="Calibri"/>
               </a:rPr>
-              <a:t>Phase 3/8  ·  Algebra 2  ·  Lesson 3-5  ·  Day 2</a:t>
+              <a:t>Phase 3/7  ·  Algebra 2  ·  Lesson 3-5  ·  Day 2</a:t>
             </a:r>
           </a:p>
         </p:txBody>
@@ -4854,7 +4721,7 @@
                 </a:solidFill>
                 <a:latin typeface="Calibri"/>
               </a:rPr>
-              <a:t>Topics:</a:t>
+              <a:t>Pure rule recall today.  The rules you’ll need in 20 minutes:</a:t>
             </a:r>
           </a:p>
           <a:p>
@@ -4866,7 +4733,7 @@
                 </a:solidFill>
                 <a:latin typeface="Calibri"/>
               </a:rPr>
-              <a:t>  •  Finding zeros from factored form</a:t>
+              <a:t/>
             </a:r>
           </a:p>
           <a:p>
@@ -4878,7 +4745,7 @@
                 </a:solidFill>
                 <a:latin typeface="Calibri"/>
               </a:rPr>
-              <a:t>  •  Counting intervals from zeros</a:t>
+              <a:t>  •  Zero Product Property  —  zero of f ⇔ factor = 0</a:t>
             </a:r>
           </a:p>
           <a:p>
@@ -4890,7 +4757,7 @@
                 </a:solidFill>
                 <a:latin typeface="Calibri"/>
               </a:rPr>
-              <a:t>  •  Difference of squares</a:t>
+              <a:t>  •  Sign direction  —  zero at x = −2 gives (x + 2)</a:t>
             </a:r>
           </a:p>
           <a:p>
@@ -4902,7 +4769,7 @@
                 </a:solidFill>
                 <a:latin typeface="Calibri"/>
               </a:rPr>
-              <a:t>  •  GCF + quadratic factoring</a:t>
+              <a:t>  •  x² + 9 (or any x² + positive) has  NO real zeros</a:t>
             </a:r>
           </a:p>
           <a:p>
@@ -4914,7 +4781,7 @@
                 </a:solidFill>
                 <a:latin typeface="Calibri"/>
               </a:rPr>
-              <a:t>  •  Sign-flip primers</a:t>
+              <a:t>  •  Highest power → end behavior</a:t>
             </a:r>
           </a:p>
           <a:p>
@@ -4926,6 +4793,18 @@
                 </a:solidFill>
                 <a:latin typeface="Calibri"/>
               </a:rPr>
+              <a:t>  •  Zeros of −f(x) are the SAME as zeros of f(x)</a:t>
+            </a:r>
+          </a:p>
+          <a:p>
+            <a:pPr algn="l"/>
+            <a:r>
+              <a:rPr sz="2400" b="0">
+                <a:solidFill>
+                  <a:srgbClr val="112233"/>
+                </a:solidFill>
+                <a:latin typeface="Calibri"/>
+              </a:rPr>
               <a:t/>
             </a:r>
           </a:p>
@@ -4938,7 +4817,7 @@
                 </a:solidFill>
                 <a:latin typeface="Calibri"/>
               </a:rPr>
-              <a:t>Focus. Play fast. Teacher is watching the dashboard — which skills need a quick reset?</a:t>
+              <a:t>Play fast.  Teacher is watching the dashboard.</a:t>
             </a:r>
           </a:p>
         </p:txBody>
@@ -5016,7 +4895,7 @@
                 </a:solidFill>
                 <a:latin typeface="Calibri"/>
               </a:rPr>
-              <a:t>Close game when timer hits 0.  “Pull out your Do Now sheet. Packet too.”</a:t>
+              <a:t>Close game at 0.  “Pull out your Do Now.  Packet too.”</a:t>
             </a:r>
           </a:p>
         </p:txBody>
@@ -5191,7 +5070,7 @@
                 </a:solidFill>
                 <a:latin typeface="Calibri"/>
               </a:rPr>
-              <a:t>Phase 4/8  ·  Algebra 2  ·  Lesson 3-5  ·  Day 2</a:t>
+              <a:t>Phase 4/7  ·  Algebra 2  ·  Lesson 3-5  ·  Day 2</a:t>
             </a:r>
           </a:p>
         </p:txBody>
@@ -5334,7 +5213,7 @@
                 </a:solidFill>
                 <a:latin typeface="Calibri"/>
               </a:rPr>
-              <a:t>6 min</a:t>
+              <a:t>8 min</a:t>
             </a:r>
           </a:p>
         </p:txBody>
@@ -5369,7 +5248,7 @@
                 </a:solidFill>
                 <a:latin typeface="Calibri"/>
               </a:rPr>
-              <a:t>Out: Do Now sheet  +  Student packet.</a:t>
+              <a:t>Out:  Do Now sheet  +  Student packet.</a:t>
             </a:r>
           </a:p>
           <a:p>
@@ -5405,7 +5284,7 @@
                 </a:solidFill>
                 <a:latin typeface="Calibri"/>
               </a:rPr>
-              <a:t>      What did you predict would stay the same?</a:t>
+              <a:t>      What did you predict would STAY THE SAME?</a:t>
             </a:r>
           </a:p>
           <a:p>
@@ -5417,7 +5296,7 @@
                 </a:solidFill>
                 <a:latin typeface="Calibri"/>
               </a:rPr>
-              <a:t>      What did you predict would change?</a:t>
+              <a:t>      What did you predict would CHANGE?</a:t>
             </a:r>
           </a:p>
           <a:p>
@@ -5465,7 +5344,7 @@
                 </a:solidFill>
                 <a:latin typeface="Calibri"/>
               </a:rPr>
-              <a:t>3.  Sentence frame:</a:t>
+              <a:t>3.  Sentence frame (say it aloud, write it later in Step 5):</a:t>
             </a:r>
           </a:p>
           <a:p>
@@ -5567,7 +5446,7 @@
                 </a:solidFill>
                 <a:latin typeface="Calibri"/>
               </a:rPr>
-              <a:t>“Pens down. Practice #13 next. Factor, then graph in Desmos. Watch x = 4.”</a:t>
+              <a:t>“Pens down.  Now: BACKWARD.  Zeros + a point → equation.”</a:t>
             </a:r>
           </a:p>
         </p:txBody>
@@ -5707,7 +5586,7 @@
                 </a:solidFill>
                 <a:latin typeface="Calibri"/>
               </a:rPr>
-              <a:t>Explore  —  Practice #13 Discovery</a:t>
+              <a:t>Explore  —  Build the Equation (Reverse)</a:t>
             </a:r>
           </a:p>
         </p:txBody>
@@ -5742,7 +5621,7 @@
                 </a:solidFill>
                 <a:latin typeface="Calibri"/>
               </a:rPr>
-              <a:t>Phase 5/8  ·  Algebra 2  ·  Lesson 3-5  ·  Day 2</a:t>
+              <a:t>Phase 5/7  ·  Algebra 2  ·  Lesson 3-5  ·  Day 2</a:t>
             </a:r>
           </a:p>
         </p:txBody>
@@ -5810,7 +5689,7 @@
         <p:spPr>
           <a:xfrm>
             <a:off x="10451592" y="365760"/>
-            <a:ext cx="960120" cy="320040"/>
+            <a:ext cx="758952" cy="320040"/>
           </a:xfrm>
           <a:prstGeom prst="roundRect">
             <a:avLst>
@@ -5850,7 +5729,7 @@
                 </a:solidFill>
                 <a:latin typeface="Calibri"/>
               </a:rPr>
-              <a:t>DOK 2–3</a:t>
+              <a:t>DOK 3</a:t>
             </a:r>
           </a:p>
         </p:txBody>
@@ -5885,7 +5764,7 @@
                 </a:solidFill>
                 <a:latin typeface="Calibri"/>
               </a:rPr>
-              <a:t>15 min</a:t>
+              <a:t>25 min</a:t>
             </a:r>
           </a:p>
         </p:txBody>
@@ -5914,97 +5793,145 @@
           <a:p>
             <a:pPr algn="l"/>
             <a:r>
-              <a:rPr sz="2400" b="0">
+              <a:rPr sz="2200" b="0">
                 <a:solidFill>
                   <a:srgbClr val="112233"/>
                 </a:solidFill>
                 <a:latin typeface="Calibri"/>
               </a:rPr>
-              <a:t>g(x) = x³ − 8x² + 16x</a:t>
-            </a:r>
-          </a:p>
-          <a:p>
-            <a:pPr algn="l"/>
-            <a:r>
-              <a:rPr sz="2400" b="0">
+              <a:t>Write the equation of a polynomial with</a:t>
+            </a:r>
+          </a:p>
+          <a:p>
+            <a:pPr algn="l"/>
+            <a:r>
+              <a:rPr sz="2200" b="0">
                 <a:solidFill>
                   <a:srgbClr val="112233"/>
                 </a:solidFill>
                 <a:latin typeface="Calibri"/>
               </a:rPr>
+              <a:t>    zeros at  x = −2,  x = 1,  x = 4</a:t>
+            </a:r>
+          </a:p>
+          <a:p>
+            <a:pPr algn="l"/>
+            <a:r>
+              <a:rPr sz="2200" b="0">
+                <a:solidFill>
+                  <a:srgbClr val="112233"/>
+                </a:solidFill>
+                <a:latin typeface="Calibri"/>
+              </a:rPr>
+              <a:t>    passing through the point  (0, −8).</a:t>
+            </a:r>
+          </a:p>
+          <a:p>
+            <a:pPr algn="l"/>
+            <a:r>
+              <a:rPr sz="2200" b="0">
+                <a:solidFill>
+                  <a:srgbClr val="112233"/>
+                </a:solidFill>
+                <a:latin typeface="Calibri"/>
+              </a:rPr>
               <a:t/>
             </a:r>
           </a:p>
           <a:p>
             <a:pPr algn="l"/>
             <a:r>
-              <a:rPr sz="2400" b="0">
+              <a:rPr sz="2200" b="0">
                 <a:solidFill>
                   <a:srgbClr val="112233"/>
                 </a:solidFill>
                 <a:latin typeface="Calibri"/>
               </a:rPr>
-              <a:t>Step 1.   Factor on blank paper.  (GCF first!)</a:t>
-            </a:r>
-          </a:p>
-          <a:p>
-            <a:pPr algn="l"/>
-            <a:r>
-              <a:rPr sz="2400" b="0">
+              <a:t>EVERYTHING YOU NEED IS ON YOUR PACKET PAGE:</a:t>
+            </a:r>
+          </a:p>
+          <a:p>
+            <a:pPr algn="l"/>
+            <a:r>
+              <a:rPr sz="2200" b="0">
                 <a:solidFill>
                   <a:srgbClr val="112233"/>
                 </a:solidFill>
                 <a:latin typeface="Calibri"/>
               </a:rPr>
-              <a:t>Step 2.   List the zeros.   How many DISTINCT zeros?</a:t>
-            </a:r>
-          </a:p>
-          <a:p>
-            <a:pPr algn="l"/>
-            <a:r>
-              <a:rPr sz="2400" b="0">
+              <a:t>  Rule 1:  zero at c  →  factor (x − c)</a:t>
+            </a:r>
+          </a:p>
+          <a:p>
+            <a:pPr algn="l"/>
+            <a:r>
+              <a:rPr sz="2200" b="0">
                 <a:solidFill>
                   <a:srgbClr val="112233"/>
                 </a:solidFill>
                 <a:latin typeface="Calibri"/>
               </a:rPr>
-              <a:t>Step 3.   Graph in Desmos.  Watch what happens at x = 4.</a:t>
-            </a:r>
-          </a:p>
-          <a:p>
-            <a:pPr algn="l"/>
-            <a:r>
-              <a:rPr sz="2400" b="0">
+              <a:t>  Rule 2:  f(x) = a · (factor)(factor)(factor) — use the point to find a.</a:t>
+            </a:r>
+          </a:p>
+          <a:p>
+            <a:pPr algn="l"/>
+            <a:r>
+              <a:rPr sz="2200" b="0">
                 <a:solidFill>
                   <a:srgbClr val="112233"/>
                 </a:solidFill>
                 <a:latin typeface="Calibri"/>
               </a:rPr>
-              <a:t>Step 4.   Sketch on blank paper.</a:t>
-            </a:r>
-          </a:p>
-          <a:p>
-            <a:pPr algn="l"/>
-            <a:r>
-              <a:rPr sz="2400" b="0">
+              <a:t/>
+            </a:r>
+          </a:p>
+          <a:p>
+            <a:pPr algn="l"/>
+            <a:r>
+              <a:rPr sz="2200" b="0">
                 <a:solidFill>
                   <a:srgbClr val="112233"/>
                 </a:solidFill>
                 <a:latin typeface="Calibri"/>
               </a:rPr>
-              <a:t/>
-            </a:r>
-          </a:p>
-          <a:p>
-            <a:pPr algn="l"/>
-            <a:r>
-              <a:rPr sz="2400" b="0">
+              <a:t>  Step 1  Zeros → factors.</a:t>
+            </a:r>
+          </a:p>
+          <a:p>
+            <a:pPr algn="l"/>
+            <a:r>
+              <a:rPr sz="2200" b="0">
                 <a:solidFill>
                   <a:srgbClr val="112233"/>
                 </a:solidFill>
                 <a:latin typeface="Calibri"/>
               </a:rPr>
-              <a:t>In one sentence — what does the graph DO at x = 4?</a:t>
+              <a:t>  Step 2  Plug in (0, −8) to solve for a.</a:t>
+            </a:r>
+          </a:p>
+          <a:p>
+            <a:pPr algn="l"/>
+            <a:r>
+              <a:rPr sz="2200" b="0">
+                <a:solidFill>
+                  <a:srgbClr val="112233"/>
+                </a:solidFill>
+                <a:latin typeface="Calibri"/>
+              </a:rPr>
+              <a:t>  Step 3  Final equation.    Step 4  Verify in Desmos.</a:t>
+            </a:r>
+          </a:p>
+          <a:p>
+            <a:pPr algn="l"/>
+            <a:r>
+              <a:rPr sz="2200" b="0">
+                <a:solidFill>
+                  <a:srgbClr val="112233"/>
+                </a:solidFill>
+                <a:latin typeface="Calibri"/>
+              </a:rPr>
+              <a:t>  Step 5  Justify to partner (use the Do Now sentence frame).</a:t>
             </a:r>
           </a:p>
         </p:txBody>
@@ -6082,7 +6009,7 @@
                 </a:solidFill>
                 <a:latin typeface="Calibri"/>
               </a:rPr>
-              <a:t>Capture student language (“touches,” “bounces”). DO NOT name multiplicity today.</a:t>
+              <a:t>Teacher circulates.  Prompts only — answer questions with questions.</a:t>
             </a:r>
           </a:p>
         </p:txBody>
@@ -6222,7 +6149,7 @@
                 </a:solidFill>
                 <a:latin typeface="Calibri"/>
               </a:rPr>
-              <a:t>Explore  —  Build the Equation (Reverse)</a:t>
+              <a:t>Share / Summary</a:t>
             </a:r>
           </a:p>
         </p:txBody>
@@ -6257,7 +6184,7 @@
                 </a:solidFill>
                 <a:latin typeface="Calibri"/>
               </a:rPr>
-              <a:t>Phase 6/8  ·  Algebra 2  ·  Lesson 3-5  ·  Day 2</a:t>
+              <a:t>Phase 6/7  ·  Algebra 2  ·  Lesson 3-5  ·  Day 2</a:t>
             </a:r>
           </a:p>
         </p:txBody>
@@ -6271,7 +6198,7 @@
         <p:spPr>
           <a:xfrm>
             <a:off x="9418320" y="365760"/>
-            <a:ext cx="960120" cy="320040"/>
+            <a:ext cx="1563624" cy="320040"/>
           </a:xfrm>
           <a:prstGeom prst="roundRect">
             <a:avLst>
@@ -6311,7 +6238,7 @@
                 </a:solidFill>
                 <a:latin typeface="Calibri"/>
               </a:rPr>
-              <a:t>Explore</a:t>
+              <a:t>Share/Summary</a:t>
             </a:r>
           </a:p>
         </p:txBody>
@@ -6324,7 +6251,7 @@
         </p:nvSpPr>
         <p:spPr>
           <a:xfrm>
-            <a:off x="10451592" y="365760"/>
+            <a:off x="11055096" y="365760"/>
             <a:ext cx="758952" cy="320040"/>
           </a:xfrm>
           <a:prstGeom prst="roundRect">
@@ -6365,7 +6292,7 @@
                 </a:solidFill>
                 <a:latin typeface="Calibri"/>
               </a:rPr>
-              <a:t>DOK 3</a:t>
+              <a:t>DOK 2</a:t>
             </a:r>
           </a:p>
         </p:txBody>
@@ -6400,7 +6327,7 @@
                 </a:solidFill>
                 <a:latin typeface="Calibri"/>
               </a:rPr>
-              <a:t>15 min</a:t>
+              <a:t>5 min</a:t>
             </a:r>
           </a:p>
         </p:txBody>
@@ -6435,7 +6362,7 @@
                 </a:solidFill>
                 <a:latin typeface="Calibri"/>
               </a:rPr>
-              <a:t>Write the equation of a polynomial with</a:t>
+              <a:t>Essential Question callback:</a:t>
             </a:r>
           </a:p>
           <a:p>
@@ -6447,7 +6374,7 @@
                 </a:solidFill>
                 <a:latin typeface="Calibri"/>
               </a:rPr>
-              <a:t>    zeros at  x = −2,  x = 1,  x = 4</a:t>
+              <a:t>How do the zeros — and a single point on the graph —</a:t>
             </a:r>
           </a:p>
           <a:p>
@@ -6459,7 +6386,7 @@
                 </a:solidFill>
                 <a:latin typeface="Calibri"/>
               </a:rPr>
-              <a:t>    passing through the point  (0, −8).</a:t>
+              <a:t>determine the polynomial’s equation?</a:t>
             </a:r>
           </a:p>
           <a:p>
@@ -6483,7 +6410,7 @@
                 </a:solidFill>
                 <a:latin typeface="Calibri"/>
               </a:rPr>
-              <a:t>Step 1.   Zeros → factors.   f(x) = a(    )(    )(    )</a:t>
+              <a:t>Self-rating on your packet:   ✓  /  partly  /  not yet</a:t>
             </a:r>
           </a:p>
           <a:p>
@@ -6495,7 +6422,7 @@
                 </a:solidFill>
                 <a:latin typeface="Calibri"/>
               </a:rPr>
-              <a:t>Step 2.   Plug in (0, −8) to find a.</a:t>
+              <a:t>  1. Zeros → factors</a:t>
             </a:r>
           </a:p>
           <a:p>
@@ -6507,7 +6434,7 @@
                 </a:solidFill>
                 <a:latin typeface="Calibri"/>
               </a:rPr>
-              <a:t>Step 3.   Write the final equation.</a:t>
+              <a:t>  2. Point → leading number a</a:t>
             </a:r>
           </a:p>
           <a:p>
@@ -6519,7 +6446,31 @@
                 </a:solidFill>
                 <a:latin typeface="Calibri"/>
               </a:rPr>
-              <a:t>Step 4.   Justify to your partner in CER format (reference at top of packet).</a:t>
+              <a:t>  3. Predicting what changes under −f(x)</a:t>
+            </a:r>
+          </a:p>
+          <a:p>
+            <a:pPr algn="l"/>
+            <a:r>
+              <a:rPr sz="2400" b="0">
+                <a:solidFill>
+                  <a:srgbClr val="112233"/>
+                </a:solidFill>
+                <a:latin typeface="Calibri"/>
+              </a:rPr>
+              <a:t/>
+            </a:r>
+          </a:p>
+          <a:p>
+            <a:pPr algn="l"/>
+            <a:r>
+              <a:rPr sz="2400" b="0">
+                <a:solidFill>
+                  <a:srgbClr val="112233"/>
+                </a:solidFill>
+                <a:latin typeface="Calibri"/>
+              </a:rPr>
+              <a:t>Preview Day 3:  what happens when a factor appears twice?</a:t>
             </a:r>
           </a:p>
         </p:txBody>
@@ -6597,7 +6548,7 @@
                 </a:solidFill>
                 <a:latin typeface="Calibri"/>
               </a:rPr>
-              <a:t>Push “because” / “since.”  If time short: verbal CER now, written CER as HW.</a:t>
+              <a:t>“Pencils up.  Summary exit ticket.  5 minutes.”</a:t>
             </a:r>
           </a:p>
         </p:txBody>
@@ -6737,7 +6688,7 @@
                 </a:solidFill>
                 <a:latin typeface="Calibri"/>
               </a:rPr>
-              <a:t>Share / Summary</a:t>
+              <a:t>Exit Ticket  —  Summary</a:t>
             </a:r>
           </a:p>
         </p:txBody>
@@ -6772,7 +6723,7 @@
                 </a:solidFill>
                 <a:latin typeface="Calibri"/>
               </a:rPr>
-              <a:t>Phase 7/8  ·  Algebra 2  ·  Lesson 3-5  ·  Day 2</a:t>
+              <a:t>Phase 7/7  ·  Algebra 2  ·  Lesson 3-5  ·  Day 2</a:t>
             </a:r>
           </a:p>
         </p:txBody>
@@ -6786,7 +6737,7 @@
         <p:spPr>
           <a:xfrm>
             <a:off x="9418320" y="365760"/>
-            <a:ext cx="1563624" cy="320040"/>
+            <a:ext cx="1362456" cy="320040"/>
           </a:xfrm>
           <a:prstGeom prst="roundRect">
             <a:avLst>
@@ -6826,7 +6777,7 @@
                 </a:solidFill>
                 <a:latin typeface="Calibri"/>
               </a:rPr>
-              <a:t>Share/Summary</a:t>
+              <a:t>Exit Ticket</a:t>
             </a:r>
           </a:p>
         </p:txBody>
@@ -6839,8 +6790,8 @@
         </p:nvSpPr>
         <p:spPr>
           <a:xfrm>
-            <a:off x="11055096" y="365760"/>
-            <a:ext cx="758952" cy="320040"/>
+            <a:off x="10853928" y="365760"/>
+            <a:ext cx="960120" cy="320040"/>
           </a:xfrm>
           <a:prstGeom prst="roundRect">
             <a:avLst>
@@ -6880,7 +6831,7 @@
                 </a:solidFill>
                 <a:latin typeface="Calibri"/>
               </a:rPr>
-              <a:t>DOK 2</a:t>
+              <a:t>DOK 1–2</a:t>
             </a:r>
           </a:p>
         </p:txBody>
@@ -6944,121 +6895,109 @@
           <a:p>
             <a:pPr algn="l"/>
             <a:r>
-              <a:rPr sz="2400" b="0">
+              <a:rPr sz="2600" b="0">
                 <a:solidFill>
                   <a:srgbClr val="112233"/>
                 </a:solidFill>
                 <a:latin typeface="Calibri"/>
               </a:rPr>
-              <a:t>Essential Question:</a:t>
-            </a:r>
-          </a:p>
-          <a:p>
-            <a:pPr algn="l"/>
-            <a:r>
-              <a:rPr sz="2400" b="0">
+              <a:t>1.  When f(x) becomes −f(x), the zeros ______</a:t>
+            </a:r>
+          </a:p>
+          <a:p>
+            <a:pPr algn="l"/>
+            <a:r>
+              <a:rPr sz="2600" b="0">
                 <a:solidFill>
                   <a:srgbClr val="112233"/>
                 </a:solidFill>
                 <a:latin typeface="Calibri"/>
               </a:rPr>
-              <a:t>How do the zeros — and a single point on the graph —</a:t>
-            </a:r>
-          </a:p>
-          <a:p>
-            <a:pPr algn="l"/>
-            <a:r>
-              <a:rPr sz="2400" b="0">
+              <a:t>     and the graph ______ .</a:t>
+            </a:r>
+          </a:p>
+          <a:p>
+            <a:pPr algn="l"/>
+            <a:r>
+              <a:rPr sz="2600" b="0">
                 <a:solidFill>
                   <a:srgbClr val="112233"/>
                 </a:solidFill>
                 <a:latin typeface="Calibri"/>
               </a:rPr>
-              <a:t>determine the polynomial’s equation?</a:t>
-            </a:r>
-          </a:p>
-          <a:p>
-            <a:pPr algn="l"/>
-            <a:r>
-              <a:rPr sz="2400" b="0">
+              <a:t/>
+            </a:r>
+          </a:p>
+          <a:p>
+            <a:pPr algn="l"/>
+            <a:r>
+              <a:rPr sz="2600" b="0">
                 <a:solidFill>
                   <a:srgbClr val="112233"/>
                 </a:solidFill>
                 <a:latin typeface="Calibri"/>
               </a:rPr>
+              <a:t>2.  To find the leading number  a , I plug in a given ______</a:t>
+            </a:r>
+          </a:p>
+          <a:p>
+            <a:pPr algn="l"/>
+            <a:r>
+              <a:rPr sz="2600" b="0">
+                <a:solidFill>
+                  <a:srgbClr val="112233"/>
+                </a:solidFill>
+                <a:latin typeface="Calibri"/>
+              </a:rPr>
+              <a:t>     and solve for  a .</a:t>
+            </a:r>
+          </a:p>
+          <a:p>
+            <a:pPr algn="l"/>
+            <a:r>
+              <a:rPr sz="2600" b="0">
+                <a:solidFill>
+                  <a:srgbClr val="112233"/>
+                </a:solidFill>
+                <a:latin typeface="Calibri"/>
+              </a:rPr>
               <a:t/>
             </a:r>
           </a:p>
           <a:p>
             <a:pPr algn="l"/>
             <a:r>
-              <a:rPr sz="2400" b="0">
+              <a:rPr sz="2600" b="0">
                 <a:solidFill>
                   <a:srgbClr val="112233"/>
                 </a:solidFill>
                 <a:latin typeface="Calibri"/>
               </a:rPr>
-              <a:t>Language Objective check:</a:t>
-            </a:r>
-          </a:p>
-          <a:p>
-            <a:pPr algn="l"/>
-            <a:r>
-              <a:rPr sz="2400" b="0">
+              <a:t>3.  One sentence — the most important thing I learned today.</a:t>
+            </a:r>
+          </a:p>
+          <a:p>
+            <a:pPr algn="l"/>
+            <a:r>
+              <a:rPr sz="2600" b="0">
                 <a:solidFill>
                   <a:srgbClr val="112233"/>
                 </a:solidFill>
                 <a:latin typeface="Calibri"/>
               </a:rPr>
-              <a:t>Who used  “The zeros stay the same because...” today?</a:t>
-            </a:r>
-          </a:p>
-          <a:p>
-            <a:pPr algn="l"/>
-            <a:r>
-              <a:rPr sz="2400" b="0">
+              <a:t/>
+            </a:r>
+          </a:p>
+          <a:p>
+            <a:pPr algn="l"/>
+            <a:r>
+              <a:rPr sz="2600" b="0">
                 <a:solidFill>
                   <a:srgbClr val="112233"/>
                 </a:solidFill>
                 <a:latin typeface="Calibri"/>
               </a:rPr>
-              <a:t/>
-            </a:r>
-          </a:p>
-          <a:p>
-            <a:pPr algn="l"/>
-            <a:r>
-              <a:rPr sz="2400" b="0">
-                <a:solidFill>
-                  <a:srgbClr val="112233"/>
-                </a:solidFill>
-                <a:latin typeface="Calibri"/>
-              </a:rPr>
-              <a:t>Self-rating on your packet:   ✓  /  partly  /  not yet</a:t>
-            </a:r>
-          </a:p>
-          <a:p>
-            <a:pPr algn="l"/>
-            <a:r>
-              <a:rPr sz="2400" b="0">
-                <a:solidFill>
-                  <a:srgbClr val="112233"/>
-                </a:solidFill>
-                <a:latin typeface="Calibri"/>
-              </a:rPr>
-              <a:t/>
-            </a:r>
-          </a:p>
-          <a:p>
-            <a:pPr algn="l"/>
-            <a:r>
-              <a:rPr sz="2400" b="0">
-                <a:solidFill>
-                  <a:srgbClr val="112233"/>
-                </a:solidFill>
-                <a:latin typeface="Calibri"/>
-              </a:rPr>
-              <a:t>Preview Day 3:  tomorrow we name what happened at x = 4.</a:t>
+              <a:t>Place your packet on the front desk as you leave.</a:t>
             </a:r>
           </a:p>
         </p:txBody>
@@ -7136,7 +7075,7 @@
                 </a:solidFill>
                 <a:latin typeface="Calibri"/>
               </a:rPr>
-              <a:t>“Pencils up. One question. CER format. 5 minutes.”</a:t>
+              <a:t>Packets to the front. Pack up. See you next class.</a:t>
             </a:r>
           </a:p>
         </p:txBody>
@@ -7174,7 +7113,7 @@
             <a:avLst/>
           </a:prstGeom>
           <a:solidFill>
-            <a:srgbClr val="EAF2FB"/>
+            <a:srgbClr val="0B3C6C"/>
           </a:solidFill>
           <a:ln>
             <a:noFill/>
@@ -7205,57 +7144,14 @@
       </p:sp>
       <p:sp>
         <p:nvSpPr>
-          <p:cNvPr id="3" name="Rectangle 2"/>
-          <p:cNvSpPr/>
-          <p:nvPr/>
-        </p:nvSpPr>
-        <p:spPr>
-          <a:xfrm>
-            <a:off x="0" y="0"/>
-            <a:ext cx="12191695" cy="1188720"/>
-          </a:xfrm>
-          <a:prstGeom prst="rect">
-            <a:avLst/>
-          </a:prstGeom>
-          <a:solidFill>
-            <a:srgbClr val="0B3C6C"/>
-          </a:solidFill>
-          <a:ln>
-            <a:noFill/>
-          </a:ln>
-        </p:spPr>
-        <p:style>
-          <a:lnRef idx="1">
-            <a:schemeClr val="accent1"/>
-          </a:lnRef>
-          <a:fillRef idx="3">
-            <a:schemeClr val="accent1"/>
-          </a:fillRef>
-          <a:effectRef idx="2">
-            <a:schemeClr val="accent1"/>
-          </a:effectRef>
-          <a:fontRef idx="minor">
-            <a:schemeClr val="lt1"/>
-          </a:fontRef>
-        </p:style>
-        <p:txBody>
-          <a:bodyPr rtlCol="0" anchor="ctr"/>
-          <a:lstStyle/>
-          <a:p>
-            <a:pPr algn="ctr"/>
-          </a:p>
-        </p:txBody>
-      </p:sp>
-      <p:sp>
-        <p:nvSpPr>
-          <p:cNvPr id="4" name="TextBox 3"/>
+          <p:cNvPr id="3" name="TextBox 2"/>
           <p:cNvSpPr txBox="1"/>
           <p:nvPr/>
         </p:nvSpPr>
         <p:spPr>
           <a:xfrm>
-            <a:off x="457200" y="164592"/>
-            <a:ext cx="8686800" cy="822960"/>
+            <a:off x="548640" y="2103120"/>
+            <a:ext cx="10972800" cy="1097280"/>
           </a:xfrm>
           <a:prstGeom prst="rect">
             <a:avLst/>
@@ -7268,29 +7164,29 @@
           </a:bodyPr>
           <a:lstStyle/>
           <a:p>
-            <a:pPr algn="l"/>
-            <a:r>
-              <a:rPr sz="3600" b="1">
+            <a:pPr algn="ctr"/>
+            <a:r>
+              <a:rPr sz="5200" b="1">
                 <a:solidFill>
                   <a:srgbClr val="FFFFFF"/>
                 </a:solidFill>
                 <a:latin typeface="Calibri"/>
               </a:rPr>
-              <a:t>Exit Ticket  —  CER</a:t>
-            </a:r>
-          </a:p>
-        </p:txBody>
-      </p:sp>
-      <p:sp>
-        <p:nvSpPr>
-          <p:cNvPr id="5" name="TextBox 4"/>
+              <a:t>Nice work today.</a:t>
+            </a:r>
+          </a:p>
+        </p:txBody>
+      </p:sp>
+      <p:sp>
+        <p:nvSpPr>
+          <p:cNvPr id="4" name="TextBox 3"/>
           <p:cNvSpPr txBox="1"/>
           <p:nvPr/>
         </p:nvSpPr>
         <p:spPr>
           <a:xfrm>
-            <a:off x="457200" y="749808"/>
-            <a:ext cx="8229600" cy="320040"/>
+            <a:off x="548640" y="3749039"/>
+            <a:ext cx="10972800" cy="1828800"/>
           </a:xfrm>
           <a:prstGeom prst="rect">
             <a:avLst/>
@@ -7303,201 +7199,23 @@
           </a:bodyPr>
           <a:lstStyle/>
           <a:p>
-            <a:pPr algn="l"/>
-            <a:r>
-              <a:rPr sz="1400" b="0">
-                <a:solidFill>
-                  <a:srgbClr val="CCDDEE"/>
-                </a:solidFill>
-                <a:latin typeface="Calibri"/>
-              </a:rPr>
-              <a:t>Phase 8/8  ·  Algebra 2  ·  Lesson 3-5  ·  Day 2</a:t>
-            </a:r>
-          </a:p>
-        </p:txBody>
-      </p:sp>
-      <p:sp>
-        <p:nvSpPr>
-          <p:cNvPr id="6" name="Rounded Rectangle 5"/>
-          <p:cNvSpPr/>
-          <p:nvPr/>
-        </p:nvSpPr>
-        <p:spPr>
-          <a:xfrm>
-            <a:off x="9418320" y="365760"/>
-            <a:ext cx="1362456" cy="320040"/>
-          </a:xfrm>
-          <a:prstGeom prst="roundRect">
-            <a:avLst>
-              <a:gd name="adj" fmla="val 50000"/>
-            </a:avLst>
-          </a:prstGeom>
-          <a:solidFill>
-            <a:srgbClr val="223344"/>
-          </a:solidFill>
-          <a:ln>
-            <a:noFill/>
-          </a:ln>
-        </p:spPr>
-        <p:style>
-          <a:lnRef idx="1">
-            <a:schemeClr val="accent1"/>
-          </a:lnRef>
-          <a:fillRef idx="3">
-            <a:schemeClr val="accent1"/>
-          </a:fillRef>
-          <a:effectRef idx="2">
-            <a:schemeClr val="accent1"/>
-          </a:effectRef>
-          <a:fontRef idx="minor">
-            <a:schemeClr val="lt1"/>
-          </a:fontRef>
-        </p:style>
-        <p:txBody>
-          <a:bodyPr rtlCol="0" anchor="ctr" lIns="73152" rIns="73152" tIns="18288" bIns="18288"/>
-          <a:lstStyle/>
-          <a:p>
             <a:pPr algn="ctr"/>
             <a:r>
-              <a:rPr sz="1100" b="1">
-                <a:solidFill>
-                  <a:srgbClr val="FFFFFF"/>
-                </a:solidFill>
-                <a:latin typeface="Calibri"/>
-              </a:rPr>
-              <a:t>Exit Ticket</a:t>
-            </a:r>
-          </a:p>
-        </p:txBody>
-      </p:sp>
-      <p:sp>
-        <p:nvSpPr>
-          <p:cNvPr id="7" name="Rounded Rectangle 6"/>
-          <p:cNvSpPr/>
-          <p:nvPr/>
-        </p:nvSpPr>
-        <p:spPr>
-          <a:xfrm>
-            <a:off x="10853928" y="365760"/>
-            <a:ext cx="758952" cy="320040"/>
-          </a:xfrm>
-          <a:prstGeom prst="roundRect">
-            <a:avLst>
-              <a:gd name="adj" fmla="val 50000"/>
-            </a:avLst>
-          </a:prstGeom>
-          <a:solidFill>
-            <a:srgbClr val="1E6FC8"/>
-          </a:solidFill>
-          <a:ln>
-            <a:noFill/>
-          </a:ln>
-        </p:spPr>
-        <p:style>
-          <a:lnRef idx="1">
-            <a:schemeClr val="accent1"/>
-          </a:lnRef>
-          <a:fillRef idx="3">
-            <a:schemeClr val="accent1"/>
-          </a:fillRef>
-          <a:effectRef idx="2">
-            <a:schemeClr val="accent1"/>
-          </a:effectRef>
-          <a:fontRef idx="minor">
-            <a:schemeClr val="lt1"/>
-          </a:fontRef>
-        </p:style>
-        <p:txBody>
-          <a:bodyPr rtlCol="0" anchor="ctr" lIns="73152" rIns="73152" tIns="18288" bIns="18288"/>
-          <a:lstStyle/>
+              <a:rPr sz="2200" b="0">
+                <a:solidFill>
+                  <a:srgbClr val="DDEEFF"/>
+                </a:solidFill>
+                <a:latin typeface="Calibri"/>
+              </a:rPr>
+              <a:t>Collect:  Exit Ticket  ·  Do Now sheet  ·  Reverse Engineering page</a:t>
+            </a:r>
+          </a:p>
           <a:p>
             <a:pPr algn="ctr"/>
             <a:r>
-              <a:rPr sz="1100" b="1">
-                <a:solidFill>
-                  <a:srgbClr val="FFFFFF"/>
-                </a:solidFill>
-                <a:latin typeface="Calibri"/>
-              </a:rPr>
-              <a:t>DOK 2</a:t>
-            </a:r>
-          </a:p>
-        </p:txBody>
-      </p:sp>
-      <p:sp>
-        <p:nvSpPr>
-          <p:cNvPr id="8" name="TextBox 7"/>
-          <p:cNvSpPr txBox="1"/>
-          <p:nvPr/>
-        </p:nvSpPr>
-        <p:spPr>
-          <a:xfrm>
-            <a:off x="9418320" y="777240"/>
-            <a:ext cx="2286000" cy="320040"/>
-          </a:xfrm>
-          <a:prstGeom prst="rect">
-            <a:avLst/>
-          </a:prstGeom>
-          <a:noFill/>
-        </p:spPr>
-        <p:txBody>
-          <a:bodyPr wrap="square">
-            <a:spAutoFit/>
-          </a:bodyPr>
-          <a:lstStyle/>
-          <a:p>
-            <a:pPr algn="l"/>
-            <a:r>
-              <a:rPr sz="1400" b="1">
-                <a:solidFill>
-                  <a:srgbClr val="CCDDEE"/>
-                </a:solidFill>
-                <a:latin typeface="Calibri"/>
-              </a:rPr>
-              <a:t>5 min</a:t>
-            </a:r>
-          </a:p>
-        </p:txBody>
-      </p:sp>
-      <p:sp>
-        <p:nvSpPr>
-          <p:cNvPr id="9" name="TextBox 8"/>
-          <p:cNvSpPr txBox="1"/>
-          <p:nvPr/>
-        </p:nvSpPr>
-        <p:spPr>
-          <a:xfrm>
-            <a:off x="548640" y="1463040"/>
-            <a:ext cx="11064240" cy="4846320"/>
-          </a:xfrm>
-          <a:prstGeom prst="rect">
-            <a:avLst/>
-          </a:prstGeom>
-          <a:noFill/>
-        </p:spPr>
-        <p:txBody>
-          <a:bodyPr wrap="square">
-            <a:spAutoFit/>
-          </a:bodyPr>
-          <a:lstStyle/>
-          <a:p>
-            <a:pPr algn="l"/>
-            <a:r>
-              <a:rPr sz="2600" b="0">
-                <a:solidFill>
-                  <a:srgbClr val="112233"/>
-                </a:solidFill>
-                <a:latin typeface="Calibri"/>
-              </a:rPr>
-              <a:t>Savvas Practice #6:</a:t>
-            </a:r>
-          </a:p>
-          <a:p>
-            <a:pPr algn="l"/>
-            <a:r>
-              <a:rPr sz="2600" b="0">
-                <a:solidFill>
-                  <a:srgbClr val="112233"/>
+              <a:rPr sz="2200" b="0">
+                <a:solidFill>
+                  <a:srgbClr val="DDEEFF"/>
                 </a:solidFill>
                 <a:latin typeface="Calibri"/>
               </a:rPr>
@@ -7505,165 +7223,15 @@
             </a:r>
           </a:p>
           <a:p>
-            <a:pPr algn="l"/>
-            <a:r>
-              <a:rPr sz="2600" b="0">
-                <a:solidFill>
-                  <a:srgbClr val="112233"/>
-                </a:solidFill>
-                <a:latin typeface="Calibri"/>
-              </a:rPr>
-              <a:t>If you use zeros to sketch the graph of a polynomial function,</a:t>
-            </a:r>
-          </a:p>
-          <a:p>
-            <a:pPr algn="l"/>
-            <a:r>
-              <a:rPr sz="2600" b="0">
-                <a:solidFill>
-                  <a:srgbClr val="112233"/>
-                </a:solidFill>
-                <a:latin typeface="Calibri"/>
-              </a:rPr>
-              <a:t>how can you verify that your graph is correct?</a:t>
-            </a:r>
-          </a:p>
-          <a:p>
-            <a:pPr algn="l"/>
-            <a:r>
-              <a:rPr sz="2600" b="0">
-                <a:solidFill>
-                  <a:srgbClr val="112233"/>
-                </a:solidFill>
-                <a:latin typeface="Calibri"/>
-              </a:rPr>
-              <a:t/>
-            </a:r>
-          </a:p>
-          <a:p>
-            <a:pPr algn="l"/>
-            <a:r>
-              <a:rPr sz="2600" b="0">
-                <a:solidFill>
-                  <a:srgbClr val="112233"/>
-                </a:solidFill>
-                <a:latin typeface="Calibri"/>
-              </a:rPr>
-              <a:t>Write:   CLAIM  →  EVIDENCE  →  REASONING</a:t>
-            </a:r>
-          </a:p>
-          <a:p>
-            <a:pPr algn="l"/>
-            <a:r>
-              <a:rPr sz="2600" b="0">
-                <a:solidFill>
-                  <a:srgbClr val="112233"/>
-                </a:solidFill>
-                <a:latin typeface="Calibri"/>
-              </a:rPr>
-              <a:t/>
-            </a:r>
-          </a:p>
-          <a:p>
-            <a:pPr algn="l"/>
-            <a:r>
-              <a:rPr sz="2600" b="0">
-                <a:solidFill>
-                  <a:srgbClr val="112233"/>
-                </a:solidFill>
-                <a:latin typeface="Calibri"/>
-              </a:rPr>
-              <a:t>Use the CER reference at the top of your packet if you need it.</a:t>
-            </a:r>
-          </a:p>
-          <a:p>
-            <a:pPr algn="l"/>
-            <a:r>
-              <a:rPr sz="2600" b="0">
-                <a:solidFill>
-                  <a:srgbClr val="112233"/>
-                </a:solidFill>
-                <a:latin typeface="Calibri"/>
-              </a:rPr>
-              <a:t>Put your packet on the front desk as you leave.</a:t>
-            </a:r>
-          </a:p>
-        </p:txBody>
-      </p:sp>
-      <p:sp>
-        <p:nvSpPr>
-          <p:cNvPr id="10" name="Rectangle 9"/>
-          <p:cNvSpPr/>
-          <p:nvPr/>
-        </p:nvSpPr>
-        <p:spPr>
-          <a:xfrm>
-            <a:off x="0" y="6263640"/>
-            <a:ext cx="12191695" cy="594360"/>
-          </a:xfrm>
-          <a:prstGeom prst="rect">
-            <a:avLst/>
-          </a:prstGeom>
-          <a:solidFill>
-            <a:srgbClr val="D94E2F"/>
-          </a:solidFill>
-          <a:ln>
-            <a:noFill/>
-          </a:ln>
-        </p:spPr>
-        <p:style>
-          <a:lnRef idx="1">
-            <a:schemeClr val="accent1"/>
-          </a:lnRef>
-          <a:fillRef idx="3">
-            <a:schemeClr val="accent1"/>
-          </a:fillRef>
-          <a:effectRef idx="2">
-            <a:schemeClr val="accent1"/>
-          </a:effectRef>
-          <a:fontRef idx="minor">
-            <a:schemeClr val="lt1"/>
-          </a:fontRef>
-        </p:style>
-        <p:txBody>
-          <a:bodyPr rtlCol="0" anchor="ctr"/>
-          <a:lstStyle/>
-          <a:p>
             <a:pPr algn="ctr"/>
-          </a:p>
-        </p:txBody>
-      </p:sp>
-      <p:sp>
-        <p:nvSpPr>
-          <p:cNvPr id="11" name="TextBox 10"/>
-          <p:cNvSpPr txBox="1"/>
-          <p:nvPr/>
-        </p:nvSpPr>
-        <p:spPr>
-          <a:xfrm>
-            <a:off x="457200" y="6327648"/>
-            <a:ext cx="11247120" cy="457200"/>
-          </a:xfrm>
-          <a:prstGeom prst="rect">
-            <a:avLst/>
-          </a:prstGeom>
-          <a:noFill/>
-        </p:spPr>
-        <p:txBody>
-          <a:bodyPr wrap="square">
-            <a:spAutoFit/>
-          </a:bodyPr>
-          <a:lstStyle/>
-          <a:p>
-            <a:pPr algn="l"/>
-            <a:r>
-              <a:rPr sz="1400" b="1">
-                <a:solidFill>
-                  <a:srgbClr val="FFFFFF"/>
-                </a:solidFill>
-                <a:latin typeface="Calibri"/>
-              </a:rPr>
-              <a:t>Packets to the front. Pack up. See you next class.</a:t>
+            <a:r>
+              <a:rPr sz="2200" b="0">
+                <a:solidFill>
+                  <a:srgbClr val="DDEEFF"/>
+                </a:solidFill>
+                <a:latin typeface="Calibri"/>
+              </a:rPr>
+              <a:t>Day 3 preview:  what happens when a factor repeats?</a:t>
             </a:r>
           </a:p>
         </p:txBody>
